--- a/report/slides/ANLP_slides_alt.pptx
+++ b/report/slides/ANLP_slides_alt.pptx
@@ -3662,7 +3662,7 @@
         <p:spPr>
           <a:xfrm>
             <a:off x="6858000" y="2148840"/>
-            <a:ext cx="5001768" cy="2941868"/>
+            <a:ext cx="5001768" cy="2970477"/>
           </a:xfrm>
           <a:prstGeom prst="roundRect">
             <a:avLst/>
@@ -3715,7 +3715,7 @@
         <p:spPr>
           <a:xfrm>
             <a:off x="7004304" y="2295144"/>
-            <a:ext cx="4709160" cy="2649260"/>
+            <a:ext cx="4709160" cy="2677870"/>
           </a:xfrm>
           <a:prstGeom prst="rect">
             <a:avLst/>
@@ -4179,7 +4179,7 @@
                 </a:solidFill>
                 <a:latin typeface="Calibri"/>
               </a:rPr>
-              <a:t>n = 9 test matches → bootstrap CIs resolve fine-tuning vs prompting (significant) but not BART vs LED (+0.029 [−0.014, +0.070]).</a:t>
+              <a:t>n = 9 test matches → bootstrap CIs resolve fine-tuning vs prompting (significant) but not LED vs BART (−0.0004 [−0.042, +0.035]).</a:t>
             </a:r>
           </a:p>
           <a:p>
@@ -4211,7 +4211,7 @@
                 </a:solidFill>
                 <a:latin typeface="Calibri"/>
               </a:rPr>
-              <a:t>NLI support rates are conservative lower bounds (ASR-noisy premises, register gap); entity precision is still unmeasured. LED was trained pre-fix (evaluation clean, training not).</a:t>
+              <a:t>NLI support rates are conservative lower bounds (ASR-noisy premises, register gap); entity precision is still unmeasured over all entity types.</a:t>
             </a:r>
           </a:p>
         </p:txBody>
@@ -6049,7 +6049,7 @@
                 </a:solidFill>
                 <a:latin typeface="Calibri"/>
               </a:rPr>
-              <a:t>Every prompting condition is significantly below fine-tuned BART (paired bootstrap; 95% CI of the difference excludes 0). The BART−LED gap (+0.029 [−0.014, +0.070]) is NOT significant.  * LED trained before the dataset fix; re-scored post-hoc on the same clean 9-match protocol.</a:t>
+              <a:t>Every prompting condition is significantly below both fine-tuned models (paired bootstrap; 95% CI of the difference excludes 0). The LED−BART gap (−0.0004 [−0.042, +0.035]) is NOT significant.</a:t>
             </a:r>
           </a:p>
         </p:txBody>
@@ -6809,7 +6809,7 @@
                 </a:solidFill>
                 <a:latin typeface="Calibri"/>
               </a:rPr>
-              <a:t>BART chunk-merger is nominally ahead (0.248 vs 0.219) but the paired difference is not significant at n = 9 — the two fine-tuned pipelines cannot be separated. LED is more consistent (narrow CI); BART has the higher ceiling (wide CI).</a:t>
+              <a:t>LED long-context is nominally ahead (0.248 vs 0.248) but the paired difference is not significant at n = 9 — the two fine-tuned pipelines cannot be separated. LED is more consistent (CI [0.230, 0.266]); BART has more variance (CI [0.208, 0.283]).</a:t>
             </a:r>
           </a:p>
           <a:p>
@@ -6850,7 +6850,7 @@
                 </a:solidFill>
                 <a:latin typeface="Calibri"/>
               </a:rPr>
-              <a:t>Why chunk-merger might really be ahead: sample efficiency at N = 80.</a:t>
+              <a:t>Why the two pipelines are statistically tied despite architectural differences:</a:t>
             </a:r>
           </a:p>
           <a:p>
@@ -6882,7 +6882,7 @@
                 </a:solidFill>
                 <a:latin typeface="Calibri"/>
               </a:rPr>
-              <a:t>LED must learn what matters inside raw 8,192-token windows from scratch — too few pairs to learn long-range attention patterns.</a:t>
+              <a:t>LED must learn what matters inside raw 8,192-token windows from scratch — too few pairs (N = 80) to learn long-range attention patterns reliably.</a:t>
             </a:r>
           </a:p>
           <a:p>
@@ -7446,7 +7446,7 @@
                 </a:solidFill>
                 <a:latin typeface="Calibri"/>
               </a:rPr>
-              <a:t>the ROUGE-best model (fine-tuned BART) states the correct final score in </a:t>
+              <a:t>fine-tuned BART (ROUGE rank 2) states the correct final score in </a:t>
             </a:r>
             <a:r>
               <a:rPr sz="1500" b="1" i="0">
@@ -7464,7 +7464,7 @@
                 </a:solidFill>
                 <a:latin typeface="Calibri"/>
               </a:rPr>
-              <a:t> and recalls only 30% of reference scorers. Fine-tuned LED: 1/9 scores, 15% scorers. Its scorelines are decorative — 1–1, 2–2, 1–0 regardless of the real 0–4, 3–0…</a:t>
+              <a:t> and recalls only 30% of reference scorers. Fine-tuned LED (ROUGE rank 1): 2/9 scores, 13% scorers. BART scorelines are decorative — 1–1, 2–2, 1–0 regardless of the real 0–4, 3–0…</a:t>
             </a:r>
           </a:p>
           <a:p>

--- a/report/slides/ANLP_slides_alt.pptx
+++ b/report/slides/ANLP_slides_alt.pptx
@@ -4106,7 +4106,7 @@
                 </a:solidFill>
                 <a:latin typeface="Calibri"/>
               </a:rPr>
-              <a:t>— the ROUGE- and BERTScore-best model never states the correct score (0/9) and has 0% of sentences entailed by the transcript. Optimising a faithfulness signal, not just measuring one, is the natural next step.</a:t>
+              <a:t>— fine-tuned LED tops ROUGE-L and BERTScore yet achieves 2/9 correct scores and 2% NLI; BART goes further at 0/9 and 0% NLI. The transcript-copying prompted LED both outrank on ROUGE remains the best-grounded (34%). Optimising faithfulness, not just measuring it, is the next step.</a:t>
             </a:r>
           </a:p>
           <a:p>
@@ -7865,7 +7865,7 @@
                 </a:solidFill>
                 <a:latin typeface="Calibri"/>
               </a:rPr>
-              <a:t>fine-tuned BART — best on every reference-based metric — has 0% of sentences entailed by the transcript; prompted long-context LED, worst on ROUGE, is best-grounded (34%) because it copies the commentary it reads.</a:t>
+              <a:t>fine-tuned LED leads on ROUGE-L and BERTScore yet has only 2% NLI support; fine-tuned BART — zero NLI-supported sentences — is even more extreme. Prompted long-context LED, outranked on every reference metric, is the best-grounded condition (34%) because it copies the commentary.</a:t>
             </a:r>
           </a:p>
           <a:p>

--- a/report/slides/ANLP_slides_alt.pptx
+++ b/report/slides/ANLP_slides_alt.pptx
@@ -3648,7 +3648,7 @@
                 </a:solidFill>
                 <a:latin typeface="Calibri"/>
               </a:rPr>
-              <a:t>After the fixes: a clean, monotone training curve → the earlier collapses were data and code defects, not modelling limits.</a:t>
+              <a:t>After the fixes (run 5, clean data): 14 epochs, val ROUGE-L peaks at 0.270 → test 0.248. Earlier collapses were data and code defects, not modelling limits.</a:t>
             </a:r>
           </a:p>
         </p:txBody>
@@ -3662,7 +3662,7 @@
         <p:spPr>
           <a:xfrm>
             <a:off x="6858000" y="2148840"/>
-            <a:ext cx="5001768" cy="2970477"/>
+            <a:ext cx="5001768" cy="2959033"/>
           </a:xfrm>
           <a:prstGeom prst="roundRect">
             <a:avLst/>
@@ -3715,7 +3715,7 @@
         <p:spPr>
           <a:xfrm>
             <a:off x="7004304" y="2295144"/>
-            <a:ext cx="4709160" cy="2677870"/>
+            <a:ext cx="4709160" cy="2666426"/>
           </a:xfrm>
           <a:prstGeom prst="rect">
             <a:avLst/>
@@ -3751,7 +3751,7 @@
                 </a:solidFill>
                 <a:latin typeface="Calibri"/>
               </a:rPr>
-              <a:t>LED fine-tuning after the fixes: val ROUGE-L peaks at 0.172 (epoch 9).</a:t>
+              <a:t>LED run 5 (clean dataset): val ROUGE-L peaks at 0.270 (epoch 12) → test 0.248.</a:t>
             </a:r>
           </a:p>
         </p:txBody>
@@ -4106,7 +4106,7 @@
                 </a:solidFill>
                 <a:latin typeface="Calibri"/>
               </a:rPr>
-              <a:t>— fine-tuned LED tops ROUGE-L and BERTScore yet achieves 2/9 correct scores and 2% NLI; BART goes further at 0/9 and 0% NLI. The transcript-copying prompted LED both outrank on ROUGE remains the best-grounded (34%). Optimising faithfulness, not just measuring it, is the next step.</a:t>
+              <a:t>— fine-tuned LED leads every reference metric yet gets 2/9 scores and 2% NLI; BART is worse at 0/9 and 0% NLI. The prompted LED both outrank on ROUGE is the best-grounded condition (34%). Optimising faithfulness, not just measuring it, is the natural next step.</a:t>
             </a:r>
           </a:p>
           <a:p>

--- a/report/slides/ANLP_slides_alt.pptx
+++ b/report/slides/ANLP_slides_alt.pptx
@@ -4029,7 +4029,7 @@
                 </a:solidFill>
                 <a:latin typeface="Calibri"/>
               </a:rPr>
-              <a:t>1.  Fine-tuning a distribution-matched chunk pipeline is the best recipe at small N </a:t>
+              <a:t>1.  Fine-tuning beats prompting at small N; the two fine-tuned pipelines tie </a:t>
             </a:r>
             <a:r>
               <a:rPr sz="1600" b="0" i="0">
@@ -4038,7 +4038,7 @@
                 </a:solidFill>
                 <a:latin typeface="Calibri"/>
               </a:rPr>
-              <a:t>— +69% over the same pre-trained model, +55% over the best prompting baseline.</a:t>
+              <a:t>— +69% over the same pre-trained model under the same pipeline, +55% over the best prompting baseline; against a format-matched null the honest margin is +0.040 ROUGE-L [+0.022, +0.059]. LED and BART are statistically indistinguishable at n = 9.</a:t>
             </a:r>
           </a:p>
           <a:p>
@@ -4211,7 +4211,23 @@
                 </a:solidFill>
                 <a:latin typeface="Calibri"/>
               </a:rPr>
-              <a:t>NLI support rates are conservative lower bounds (ASR-noisy premises, register gap); entity precision is still unmeasured over all entity types.</a:t>
+              <a:t>NLI support rates are conservative lower bounds (ASR-noisy premises, register gap).</a:t>
+            </a:r>
+          </a:p>
+          <a:p>
+            <a:pPr lvl="1">
+              <a:spcAft>
+                <a:spcPts val="900"/>
+              </a:spcAft>
+            </a:pPr>
+            <a:r>
+              <a:rPr sz="1400" b="0" i="0">
+                <a:solidFill>
+                  <a:srgbClr val="F4F6FA"/>
+                </a:solidFill>
+                <a:latin typeface="Calibri"/>
+              </a:rPr>
+              <a:t>Reference metrics are format-saturated — 84% of our ROUGE-L needs no correct facts.</a:t>
             </a:r>
           </a:p>
         </p:txBody>
@@ -5935,7 +5951,7 @@
                 </a:solidFill>
                 <a:latin typeface="Georgia"/>
               </a:rPr>
-              <a:t>Fine-tuning wins, and the gap is significant</a:t>
+              <a:t>Fine-tuning wins — but only it clears the null floor</a:t>
             </a:r>
           </a:p>
           <a:p>
@@ -5960,7 +5976,7 @@
         <p:spPr>
           <a:xfrm>
             <a:off x="2468880" y="1783080"/>
-            <a:ext cx="7242048" cy="4060376"/>
+            <a:ext cx="7242048" cy="4058120"/>
           </a:xfrm>
           <a:prstGeom prst="roundRect">
             <a:avLst/>
@@ -6013,7 +6029,7 @@
         <p:spPr>
           <a:xfrm>
             <a:off x="2615184" y="1929384"/>
-            <a:ext cx="6949440" cy="3767769"/>
+            <a:ext cx="6949440" cy="3765512"/>
           </a:xfrm>
           <a:prstGeom prst="rect">
             <a:avLst/>
@@ -6049,7 +6065,7 @@
                 </a:solidFill>
                 <a:latin typeface="Calibri"/>
               </a:rPr>
-              <a:t>Every prompting condition is significantly below both fine-tuned models (paired bootstrap; 95% CI of the difference excludes 0). The LED−BART gap (−0.0004 [−0.042, +0.035]) is NOT significant.</a:t>
+              <a:t>Every prompting condition is significantly below both fine-tuned models (paired bootstrap; 95% CI of the difference excludes 0) — and below the dashed null floor. Only the fine-tuned models clear it, by +0.040 [+0.022, +0.059]. The LED−BART gap (−0.0004 [−0.042, +0.035]) is NOT significant.</a:t>
             </a:r>
           </a:p>
         </p:txBody>
@@ -6488,7 +6504,7 @@
                 </a:solidFill>
                 <a:latin typeface="Calibri"/>
               </a:rPr>
-              <a:t>+55% over the strongest prompting condition of any architecture (LED zero-shot, 0.160).</a:t>
+              <a:t>+55% over the strongest prompting condition of any architecture (LED zero-shot, 0.160) — but that baseline sits below the null floor; see Finding 3.</a:t>
             </a:r>
           </a:p>
         </p:txBody>
@@ -7227,7 +7243,7 @@
                 </a:solidFill>
                 <a:latin typeface="Calibri"/>
               </a:rPr>
-              <a:t>Fine-tuned BART (best model) — 2019 UCL Final (true: Liverpool 2–0 Tottenham, Madrid, no shootout)</a:t>
+              <a:t>Fine-tuned BART (ROUGE rank 2) — 2019 UCL Final (true: Liverpool 2–0 Tottenham, Madrid, no shootout)</a:t>
             </a:r>
           </a:p>
           <a:p>
@@ -7335,7 +7351,7 @@
                 </a:solidFill>
                 <a:latin typeface="Calibri"/>
               </a:rPr>
-              <a:t>Fine-tuned LED — 2001 FA Cup Final (true: Liverpool 2–1 Arsenal, Millennium Stadium)</a:t>
+              <a:t>Fine-tuned LED (ROUGE rank 1) — 2001 FA Cup Final (true: Arsenal 1–2 Liverpool, Millennium Stadium)</a:t>
             </a:r>
           </a:p>
           <a:p>
@@ -7346,7 +7362,7 @@
                 </a:solidFill>
                 <a:latin typeface="Calibri"/>
               </a:rPr>
-              <a:t>“Liverpool 1–0 Arsenal, Premier League, 20 May 2001 — Anfield, Anfield, Emirates Stadium, Anfield… Liverpool dominated the first half…”</a:t>
+              <a:t>“Liverpool 1–0 Arsenal · 2023–24 UEFA Cup Final, Millennium Stadium, Cardiff, UK – 24 May 2021 … Mohamed Salah curled a low shot into the top corner…” — wrong score, wrong date, wrong competition, scorers who were toddlers in 2001; the venue is the one grounded detail.</a:t>
             </a:r>
           </a:p>
         </p:txBody>
@@ -7489,7 +7505,7 @@
                 </a:solidFill>
                 <a:latin typeface="Calibri"/>
               </a:rPr>
-              <a:t>ROUGE rewards the hallucination: </a:t>
+              <a:t>ROUGE rewards the format, and we measured how much: </a:t>
             </a:r>
             <a:r>
               <a:rPr sz="1500" b="0" i="0">
@@ -7498,7 +7514,41 @@
                 </a:solidFill>
                 <a:latin typeface="Calibri"/>
               </a:rPr>
-              <a:t>the overlapping n-grams (team names, date formats, report style) are exactly what the models reproduce; wrong facts cost nothing.</a:t>
+              <a:t>a wrong match’s report — right template, every fact wrong — already scores ROUGE-L 0.208, 84% of our best model. Every prompting condition scores below a template with no match facts at all. Only +0.040 [+0.022, +0.059] of the fine-tuned score is real match content.</a:t>
+            </a:r>
+          </a:p>
+          <a:p>
+            <a:pPr>
+              <a:spcAft>
+                <a:spcPts val="900"/>
+              </a:spcAft>
+            </a:pPr>
+            <a:r>
+              <a:rPr sz="1300" b="1" i="0">
+                <a:solidFill>
+                  <a:srgbClr val="3DD6B8"/>
+                </a:solidFill>
+                <a:latin typeface="Calibri"/>
+              </a:rPr>
+              <a:t>▸ </a:t>
+            </a:r>
+            <a:r>
+              <a:rPr sz="1500" b="1" i="0">
+                <a:solidFill>
+                  <a:srgbClr val="F4F6FA"/>
+                </a:solidFill>
+                <a:latin typeface="Calibri"/>
+              </a:rPr>
+              <a:t>And nothing was lost in transcription: </a:t>
+            </a:r>
+            <a:r>
+              <a:rPr sz="1500" b="0" i="0">
+                <a:solidFill>
+                  <a:srgbClr val="F4F6FA"/>
+                </a:solidFill>
+                <a:latin typeface="Calibri"/>
+              </a:rPr>
+              <a:t>all 22 reference scorers appear in the transcripts the models read — a 100% ceiling on scorer recall, of which BART realises 30% and LED 13%. Extraction failure, not ASR noise.</a:t>
             </a:r>
           </a:p>
         </p:txBody>
